--- a/Reporte 150526.pptx
+++ b/Reporte 150526.pptx
@@ -5,7 +5,7 @@
     <p:sldMasterId id="2147483672" r:id="rId1"/>
   </p:sldMasterIdLst>
   <p:notesMasterIdLst>
-    <p:notesMasterId r:id="rId18"/>
+    <p:notesMasterId r:id="rId19"/>
   </p:notesMasterIdLst>
   <p:sldIdLst>
     <p:sldId id="350" r:id="rId2"/>
@@ -22,24 +22,25 @@
     <p:sldId id="369" r:id="rId13"/>
     <p:sldId id="361" r:id="rId14"/>
     <p:sldId id="371" r:id="rId15"/>
-    <p:sldId id="384" r:id="rId16"/>
-    <p:sldId id="280" r:id="rId17"/>
+    <p:sldId id="395" r:id="rId16"/>
+    <p:sldId id="384" r:id="rId17"/>
+    <p:sldId id="280" r:id="rId18"/>
   </p:sldIdLst>
   <p:sldSz cx="9144000" cy="5143500" type="screen16x9"/>
   <p:notesSz cx="6858000" cy="9144000"/>
   <p:embeddedFontLst>
     <p:embeddedFont>
-      <p:font typeface="Montserrat" pitchFamily="2" charset="0"/>
-      <p:regular r:id="rId19"/>
-      <p:bold r:id="rId20"/>
-      <p:italic r:id="rId21"/>
-      <p:boldItalic r:id="rId22"/>
+      <p:font typeface="Montserrat" panose="00000500000000000000" pitchFamily="2" charset="0"/>
+      <p:regular r:id="rId20"/>
+      <p:bold r:id="rId21"/>
+      <p:italic r:id="rId22"/>
+      <p:boldItalic r:id="rId23"/>
     </p:embeddedFont>
     <p:embeddedFont>
-      <p:font typeface="Montserrat Black" pitchFamily="2" charset="0"/>
-      <p:bold r:id="rId23"/>
-      <p:italic r:id="rId24"/>
-      <p:boldItalic r:id="rId25"/>
+      <p:font typeface="Montserrat Black" panose="00000A00000000000000" pitchFamily="2" charset="0"/>
+      <p:bold r:id="rId24"/>
+      <p:italic r:id="rId25"/>
+      <p:boldItalic r:id="rId26"/>
     </p:embeddedFont>
   </p:embeddedFontLst>
   <p:defaultTextStyle>
@@ -6384,10 +6385,10 @@
       </p:sp>
       <p:pic>
         <p:nvPicPr>
-          <p:cNvPr id="5" name="Imagen 4">
+          <p:cNvPr id="4" name="Imagen 3">
             <a:extLst>
               <a:ext uri="{FF2B5EF4-FFF2-40B4-BE49-F238E27FC236}">
-                <a16:creationId xmlns:a16="http://schemas.microsoft.com/office/drawing/2014/main" id="{B9D7ED03-A9D6-D970-D0ED-490F3FA00142}"/>
+                <a16:creationId xmlns:a16="http://schemas.microsoft.com/office/drawing/2014/main" id="{69BB49D2-8B6F-B839-0BF3-4BC0BE86FDBD}"/>
               </a:ext>
             </a:extLst>
           </p:cNvPr>
@@ -6404,8 +6405,8 @@
         </p:blipFill>
         <p:spPr>
           <a:xfrm>
-            <a:off x="0" y="588956"/>
-            <a:ext cx="9144000" cy="3965587"/>
+            <a:off x="0" y="583157"/>
+            <a:ext cx="9144000" cy="3977186"/>
           </a:xfrm>
           <a:prstGeom prst="rect">
             <a:avLst/>
@@ -6482,10 +6483,10 @@
       </p:sp>
       <p:pic>
         <p:nvPicPr>
-          <p:cNvPr id="4" name="Imagen 3">
+          <p:cNvPr id="3" name="Imagen 2">
             <a:extLst>
               <a:ext uri="{FF2B5EF4-FFF2-40B4-BE49-F238E27FC236}">
-                <a16:creationId xmlns:a16="http://schemas.microsoft.com/office/drawing/2014/main" id="{1E6CF5F6-4C23-464F-A986-C37B901A6D7A}"/>
+                <a16:creationId xmlns:a16="http://schemas.microsoft.com/office/drawing/2014/main" id="{A4B9703D-03F3-CFEB-0B0F-F6BC41B86FF6}"/>
               </a:ext>
             </a:extLst>
           </p:cNvPr>
@@ -6502,8 +6503,8 @@
         </p:blipFill>
         <p:spPr>
           <a:xfrm>
-            <a:off x="0" y="1105164"/>
-            <a:ext cx="9144000" cy="2933172"/>
+            <a:off x="0" y="1399119"/>
+            <a:ext cx="9144000" cy="2345262"/>
           </a:xfrm>
           <a:prstGeom prst="rect">
             <a:avLst/>
@@ -6586,10 +6587,10 @@
       </p:sp>
       <p:pic>
         <p:nvPicPr>
-          <p:cNvPr id="3" name="Imagen 2">
+          <p:cNvPr id="4" name="Imagen 3">
             <a:extLst>
               <a:ext uri="{FF2B5EF4-FFF2-40B4-BE49-F238E27FC236}">
-                <a16:creationId xmlns:a16="http://schemas.microsoft.com/office/drawing/2014/main" id="{0513B43A-4523-D147-30B7-1B50954A8272}"/>
+                <a16:creationId xmlns:a16="http://schemas.microsoft.com/office/drawing/2014/main" id="{D851BF6E-4BEC-DD85-D7A2-9207B3F394E2}"/>
               </a:ext>
             </a:extLst>
           </p:cNvPr>
@@ -6606,8 +6607,8 @@
         </p:blipFill>
         <p:spPr>
           <a:xfrm>
-            <a:off x="0" y="490482"/>
-            <a:ext cx="9144000" cy="4305411"/>
+            <a:off x="0" y="718781"/>
+            <a:ext cx="9144000" cy="3705938"/>
           </a:xfrm>
           <a:prstGeom prst="rect">
             <a:avLst/>
@@ -6684,10 +6685,10 @@
       </p:sp>
       <p:pic>
         <p:nvPicPr>
-          <p:cNvPr id="7" name="Imagen 6">
+          <p:cNvPr id="4" name="Imagen 3">
             <a:extLst>
               <a:ext uri="{FF2B5EF4-FFF2-40B4-BE49-F238E27FC236}">
-                <a16:creationId xmlns:a16="http://schemas.microsoft.com/office/drawing/2014/main" id="{D0EAF978-63D4-C5E7-D1B3-0778CA43DC0E}"/>
+                <a16:creationId xmlns:a16="http://schemas.microsoft.com/office/drawing/2014/main" id="{CCE932E0-C1DF-C81B-1CC9-DC940EC32BF8}"/>
               </a:ext>
             </a:extLst>
           </p:cNvPr>
@@ -6704,8 +6705,8 @@
         </p:blipFill>
         <p:spPr>
           <a:xfrm>
-            <a:off x="0" y="1025858"/>
-            <a:ext cx="9144000" cy="3091784"/>
+            <a:off x="0" y="1020086"/>
+            <a:ext cx="9144000" cy="3103327"/>
           </a:xfrm>
           <a:prstGeom prst="rect">
             <a:avLst/>
@@ -6782,10 +6783,10 @@
       </p:sp>
       <p:pic>
         <p:nvPicPr>
-          <p:cNvPr id="3" name="Imagen 2">
+          <p:cNvPr id="4" name="Imagen 3">
             <a:extLst>
               <a:ext uri="{FF2B5EF4-FFF2-40B4-BE49-F238E27FC236}">
-                <a16:creationId xmlns:a16="http://schemas.microsoft.com/office/drawing/2014/main" id="{08FE255B-687D-92CF-831A-9176B9D53F43}"/>
+                <a16:creationId xmlns:a16="http://schemas.microsoft.com/office/drawing/2014/main" id="{48ED8601-25A0-14BA-A7A7-4AD35D15566E}"/>
               </a:ext>
             </a:extLst>
           </p:cNvPr>
@@ -6802,8 +6803,8 @@
         </p:blipFill>
         <p:spPr>
           <a:xfrm>
-            <a:off x="0" y="1495688"/>
-            <a:ext cx="9144000" cy="2152124"/>
+            <a:off x="0" y="439651"/>
+            <a:ext cx="9144000" cy="4264197"/>
           </a:xfrm>
           <a:prstGeom prst="rect">
             <a:avLst/>
@@ -6824,6 +6825,110 @@
 </file>
 
 <file path=ppt/slides/slide15.xml><?xml version="1.0" encoding="utf-8"?>
+<p:sld xmlns:a="http://schemas.openxmlformats.org/drawingml/2006/main" xmlns:r="http://schemas.openxmlformats.org/officeDocument/2006/relationships" xmlns:p="http://schemas.openxmlformats.org/presentationml/2006/main">
+  <p:cSld>
+    <p:spTree>
+      <p:nvGrpSpPr>
+        <p:cNvPr id="1" name="">
+          <a:extLst>
+            <a:ext uri="{FF2B5EF4-FFF2-40B4-BE49-F238E27FC236}">
+              <a16:creationId xmlns:a16="http://schemas.microsoft.com/office/drawing/2014/main" id="{B47B0E9F-E360-ACDB-E57D-401EDB389440}"/>
+            </a:ext>
+          </a:extLst>
+        </p:cNvPr>
+        <p:cNvGrpSpPr/>
+        <p:nvPr/>
+      </p:nvGrpSpPr>
+      <p:grpSpPr>
+        <a:xfrm>
+          <a:off x="0" y="0"/>
+          <a:ext cx="0" cy="0"/>
+          <a:chOff x="0" y="0"/>
+          <a:chExt cx="0" cy="0"/>
+        </a:xfrm>
+      </p:grpSpPr>
+      <p:sp>
+        <p:nvSpPr>
+          <p:cNvPr id="6" name="CuadroTexto 5">
+            <a:extLst>
+              <a:ext uri="{FF2B5EF4-FFF2-40B4-BE49-F238E27FC236}">
+                <a16:creationId xmlns:a16="http://schemas.microsoft.com/office/drawing/2014/main" id="{B1CD016F-D797-35F5-63C6-DEC4196C6DCB}"/>
+              </a:ext>
+            </a:extLst>
+          </p:cNvPr>
+          <p:cNvSpPr txBox="1"/>
+          <p:nvPr/>
+        </p:nvSpPr>
+        <p:spPr>
+          <a:xfrm>
+            <a:off x="1926166" y="88135"/>
+            <a:ext cx="5291667" cy="307777"/>
+          </a:xfrm>
+          <a:prstGeom prst="rect">
+            <a:avLst/>
+          </a:prstGeom>
+          <a:noFill/>
+        </p:spPr>
+        <p:txBody>
+          <a:bodyPr wrap="square" rtlCol="0">
+            <a:spAutoFit/>
+          </a:bodyPr>
+          <a:lstStyle/>
+          <a:p>
+            <a:pPr algn="ctr"/>
+            <a:r>
+              <a:rPr lang="es-MX" b="1" dirty="0">
+                <a:latin typeface="Montserrat" pitchFamily="2" charset="0"/>
+              </a:rPr>
+              <a:t>Temas de gobierno por radiodifusora</a:t>
+            </a:r>
+          </a:p>
+        </p:txBody>
+      </p:sp>
+      <p:pic>
+        <p:nvPicPr>
+          <p:cNvPr id="3" name="Imagen 2">
+            <a:extLst>
+              <a:ext uri="{FF2B5EF4-FFF2-40B4-BE49-F238E27FC236}">
+                <a16:creationId xmlns:a16="http://schemas.microsoft.com/office/drawing/2014/main" id="{101426BF-CD17-867D-C8EA-7701F4B29272}"/>
+              </a:ext>
+            </a:extLst>
+          </p:cNvPr>
+          <p:cNvPicPr>
+            <a:picLocks noChangeAspect="1"/>
+          </p:cNvPicPr>
+          <p:nvPr/>
+        </p:nvPicPr>
+        <p:blipFill>
+          <a:blip r:embed="rId2"/>
+          <a:stretch>
+            <a:fillRect/>
+          </a:stretch>
+        </p:blipFill>
+        <p:spPr>
+          <a:xfrm>
+            <a:off x="1533101" y="575984"/>
+            <a:ext cx="6077798" cy="3991532"/>
+          </a:xfrm>
+          <a:prstGeom prst="rect">
+            <a:avLst/>
+          </a:prstGeom>
+        </p:spPr>
+      </p:pic>
+    </p:spTree>
+    <p:extLst>
+      <p:ext uri="{BB962C8B-B14F-4D97-AF65-F5344CB8AC3E}">
+        <p14:creationId xmlns:p14="http://schemas.microsoft.com/office/powerpoint/2010/main" val="3243088911"/>
+      </p:ext>
+    </p:extLst>
+  </p:cSld>
+  <p:clrMapOvr>
+    <a:masterClrMapping/>
+  </p:clrMapOvr>
+</p:sld>
+</file>
+
+<file path=ppt/slides/slide16.xml><?xml version="1.0" encoding="utf-8"?>
 <p:sld xmlns:a="http://schemas.openxmlformats.org/drawingml/2006/main" xmlns:r="http://schemas.openxmlformats.org/officeDocument/2006/relationships" xmlns:p="http://schemas.openxmlformats.org/presentationml/2006/main">
   <p:cSld>
     <p:spTree>
@@ -6880,10 +6985,10 @@
       </p:sp>
       <p:pic>
         <p:nvPicPr>
-          <p:cNvPr id="3" name="Imagen 2">
+          <p:cNvPr id="5" name="Imagen 4">
             <a:extLst>
               <a:ext uri="{FF2B5EF4-FFF2-40B4-BE49-F238E27FC236}">
-                <a16:creationId xmlns:a16="http://schemas.microsoft.com/office/drawing/2014/main" id="{F04F7198-9B4B-BAC2-69C4-FBF7AAFDB935}"/>
+                <a16:creationId xmlns:a16="http://schemas.microsoft.com/office/drawing/2014/main" id="{16A5E25C-4853-CA26-6C52-E6D05C9A929A}"/>
               </a:ext>
             </a:extLst>
           </p:cNvPr>
@@ -6900,8 +7005,8 @@
         </p:blipFill>
         <p:spPr>
           <a:xfrm>
-            <a:off x="2995392" y="714116"/>
-            <a:ext cx="3153215" cy="3715268"/>
+            <a:off x="161309" y="1009432"/>
+            <a:ext cx="8821381" cy="3124636"/>
           </a:xfrm>
           <a:prstGeom prst="rect">
             <a:avLst/>
@@ -6921,7 +7026,7 @@
 </p:sld>
 </file>
 
-<file path=ppt/slides/slide16.xml><?xml version="1.0" encoding="utf-8"?>
+<file path=ppt/slides/slide17.xml><?xml version="1.0" encoding="utf-8"?>
 <p:sld xmlns:a="http://schemas.openxmlformats.org/drawingml/2006/main" xmlns:r="http://schemas.openxmlformats.org/officeDocument/2006/relationships" xmlns:p="http://schemas.openxmlformats.org/presentationml/2006/main">
   <p:cSld>
     <p:spTree>
@@ -7048,10 +7153,10 @@
       </p:sp>
       <p:pic>
         <p:nvPicPr>
-          <p:cNvPr id="3" name="Imagen 2">
+          <p:cNvPr id="6" name="Imagen 5">
             <a:extLst>
               <a:ext uri="{FF2B5EF4-FFF2-40B4-BE49-F238E27FC236}">
-                <a16:creationId xmlns:a16="http://schemas.microsoft.com/office/drawing/2014/main" id="{15C771DF-F4C5-8699-A243-DBD4DC97CF6E}"/>
+                <a16:creationId xmlns:a16="http://schemas.microsoft.com/office/drawing/2014/main" id="{E5B22007-1563-F99F-1CF5-6F3DC33ED31D}"/>
               </a:ext>
             </a:extLst>
           </p:cNvPr>
@@ -7068,8 +7173,8 @@
         </p:blipFill>
         <p:spPr>
           <a:xfrm>
-            <a:off x="0" y="663243"/>
-            <a:ext cx="9144000" cy="3817014"/>
+            <a:off x="0" y="872313"/>
+            <a:ext cx="9144000" cy="3398873"/>
           </a:xfrm>
           <a:prstGeom prst="rect">
             <a:avLst/>
@@ -7156,10 +7261,10 @@
       </p:sp>
       <p:pic>
         <p:nvPicPr>
-          <p:cNvPr id="4" name="Imagen 3">
+          <p:cNvPr id="3" name="Imagen 2">
             <a:extLst>
               <a:ext uri="{FF2B5EF4-FFF2-40B4-BE49-F238E27FC236}">
-                <a16:creationId xmlns:a16="http://schemas.microsoft.com/office/drawing/2014/main" id="{AD6D99CF-DF9C-D981-A324-5687AAB8B796}"/>
+                <a16:creationId xmlns:a16="http://schemas.microsoft.com/office/drawing/2014/main" id="{C1BEFD6B-27C9-A15E-C599-29B609211317}"/>
               </a:ext>
             </a:extLst>
           </p:cNvPr>
@@ -7176,8 +7281,8 @@
         </p:blipFill>
         <p:spPr>
           <a:xfrm>
-            <a:off x="0" y="1276814"/>
-            <a:ext cx="9144000" cy="2732747"/>
+            <a:off x="0" y="1345600"/>
+            <a:ext cx="9144000" cy="2452300"/>
           </a:xfrm>
           <a:prstGeom prst="rect">
             <a:avLst/>
@@ -7270,10 +7375,10 @@
       </p:sp>
       <p:pic>
         <p:nvPicPr>
-          <p:cNvPr id="3" name="Imagen 2">
+          <p:cNvPr id="2" name="Imagen 1">
             <a:extLst>
               <a:ext uri="{FF2B5EF4-FFF2-40B4-BE49-F238E27FC236}">
-                <a16:creationId xmlns:a16="http://schemas.microsoft.com/office/drawing/2014/main" id="{3CF3E114-8830-2837-1737-3EE104222703}"/>
+                <a16:creationId xmlns:a16="http://schemas.microsoft.com/office/drawing/2014/main" id="{0231359D-FD86-42E5-EF87-99F180C71C42}"/>
               </a:ext>
             </a:extLst>
           </p:cNvPr>
@@ -7290,8 +7395,8 @@
         </p:blipFill>
         <p:spPr>
           <a:xfrm>
-            <a:off x="1149897" y="585900"/>
-            <a:ext cx="6844205" cy="3904200"/>
+            <a:off x="767453" y="744064"/>
+            <a:ext cx="7536069" cy="3798248"/>
           </a:xfrm>
           <a:prstGeom prst="rect">
             <a:avLst/>
@@ -7374,10 +7479,10 @@
       </p:sp>
       <p:pic>
         <p:nvPicPr>
-          <p:cNvPr id="3" name="Imagen 2">
+          <p:cNvPr id="5" name="Imagen 4">
             <a:extLst>
               <a:ext uri="{FF2B5EF4-FFF2-40B4-BE49-F238E27FC236}">
-                <a16:creationId xmlns:a16="http://schemas.microsoft.com/office/drawing/2014/main" id="{1C106E2B-D9DC-582B-3D3C-B377F3251E12}"/>
+                <a16:creationId xmlns:a16="http://schemas.microsoft.com/office/drawing/2014/main" id="{1D06D7DC-636B-3463-5859-C4512B406BAE}"/>
               </a:ext>
             </a:extLst>
           </p:cNvPr>
@@ -7394,38 +7499,8 @@
         </p:blipFill>
         <p:spPr>
           <a:xfrm>
-            <a:off x="651915" y="409273"/>
-            <a:ext cx="7840169" cy="4324954"/>
-          </a:xfrm>
-          <a:prstGeom prst="rect">
-            <a:avLst/>
-          </a:prstGeom>
-        </p:spPr>
-      </p:pic>
-      <p:pic>
-        <p:nvPicPr>
-          <p:cNvPr id="4" name="Imagen 3">
-            <a:extLst>
-              <a:ext uri="{FF2B5EF4-FFF2-40B4-BE49-F238E27FC236}">
-                <a16:creationId xmlns:a16="http://schemas.microsoft.com/office/drawing/2014/main" id="{2448E167-0E0F-96E8-62D3-6C9680798D3A}"/>
-              </a:ext>
-            </a:extLst>
-          </p:cNvPr>
-          <p:cNvPicPr>
-            <a:picLocks noChangeAspect="1"/>
-          </p:cNvPicPr>
-          <p:nvPr/>
-        </p:nvPicPr>
-        <p:blipFill>
-          <a:blip r:embed="rId3"/>
-          <a:stretch>
-            <a:fillRect/>
-          </a:stretch>
-        </p:blipFill>
-        <p:spPr>
-          <a:xfrm>
-            <a:off x="599520" y="580747"/>
-            <a:ext cx="7944959" cy="3982006"/>
+            <a:off x="594757" y="1847749"/>
+            <a:ext cx="7954485" cy="1448002"/>
           </a:xfrm>
           <a:prstGeom prst="rect">
             <a:avLst/>
@@ -7510,10 +7585,10 @@
       </p:sp>
       <p:pic>
         <p:nvPicPr>
-          <p:cNvPr id="3" name="Imagen 2">
+          <p:cNvPr id="4" name="Imagen 3">
             <a:extLst>
               <a:ext uri="{FF2B5EF4-FFF2-40B4-BE49-F238E27FC236}">
-                <a16:creationId xmlns:a16="http://schemas.microsoft.com/office/drawing/2014/main" id="{0F2F7A3A-3C32-CDD2-64A4-1FB1ACF26E14}"/>
+                <a16:creationId xmlns:a16="http://schemas.microsoft.com/office/drawing/2014/main" id="{4AD2D19B-04E7-7034-1CB9-8B8AD4899A0B}"/>
               </a:ext>
             </a:extLst>
           </p:cNvPr>
@@ -7530,8 +7605,8 @@
         </p:blipFill>
         <p:spPr>
           <a:xfrm>
-            <a:off x="0" y="639919"/>
-            <a:ext cx="9144000" cy="3863662"/>
+            <a:off x="0" y="870483"/>
+            <a:ext cx="9144000" cy="3402533"/>
           </a:xfrm>
           <a:prstGeom prst="rect">
             <a:avLst/>
@@ -7616,10 +7691,10 @@
       </p:sp>
       <p:pic>
         <p:nvPicPr>
-          <p:cNvPr id="3" name="Imagen 2">
+          <p:cNvPr id="2" name="Imagen 1">
             <a:extLst>
               <a:ext uri="{FF2B5EF4-FFF2-40B4-BE49-F238E27FC236}">
-                <a16:creationId xmlns:a16="http://schemas.microsoft.com/office/drawing/2014/main" id="{F6FB03A3-09A0-3AC5-3DC4-E44EDBFC7589}"/>
+                <a16:creationId xmlns:a16="http://schemas.microsoft.com/office/drawing/2014/main" id="{36C5247D-C97B-8D8A-6DF3-08186D1012B1}"/>
               </a:ext>
             </a:extLst>
           </p:cNvPr>
@@ -7636,8 +7711,8 @@
         </p:blipFill>
         <p:spPr>
           <a:xfrm>
-            <a:off x="1149897" y="585900"/>
-            <a:ext cx="6844205" cy="3904200"/>
+            <a:off x="1143000" y="809752"/>
+            <a:ext cx="6858000" cy="3456495"/>
           </a:xfrm>
           <a:prstGeom prst="rect">
             <a:avLst/>
@@ -7714,10 +7789,10 @@
       </p:sp>
       <p:pic>
         <p:nvPicPr>
-          <p:cNvPr id="3" name="Imagen 2">
+          <p:cNvPr id="2" name="Imagen 1">
             <a:extLst>
               <a:ext uri="{FF2B5EF4-FFF2-40B4-BE49-F238E27FC236}">
-                <a16:creationId xmlns:a16="http://schemas.microsoft.com/office/drawing/2014/main" id="{C52DD43C-94DC-60E5-3846-8A28E13AADCA}"/>
+                <a16:creationId xmlns:a16="http://schemas.microsoft.com/office/drawing/2014/main" id="{660FA375-11E6-BE44-9819-414397004D9F}"/>
               </a:ext>
             </a:extLst>
           </p:cNvPr>
@@ -7734,8 +7809,8 @@
         </p:blipFill>
         <p:spPr>
           <a:xfrm>
-            <a:off x="1149897" y="585900"/>
-            <a:ext cx="6844205" cy="3904200"/>
+            <a:off x="1143000" y="809752"/>
+            <a:ext cx="6858000" cy="3456495"/>
           </a:xfrm>
           <a:prstGeom prst="rect">
             <a:avLst/>
@@ -7824,10 +7899,10 @@
       </p:sp>
       <p:pic>
         <p:nvPicPr>
-          <p:cNvPr id="3" name="Imagen 2">
+          <p:cNvPr id="4" name="Imagen 3">
             <a:extLst>
               <a:ext uri="{FF2B5EF4-FFF2-40B4-BE49-F238E27FC236}">
-                <a16:creationId xmlns:a16="http://schemas.microsoft.com/office/drawing/2014/main" id="{FE08F85B-3A5E-B37C-5E2B-4CA379B6DFF3}"/>
+                <a16:creationId xmlns:a16="http://schemas.microsoft.com/office/drawing/2014/main" id="{9EF33A75-C1B6-71E0-9DC1-FAFD472BE6AC}"/>
               </a:ext>
             </a:extLst>
           </p:cNvPr>
@@ -7844,38 +7919,8 @@
         </p:blipFill>
         <p:spPr>
           <a:xfrm>
-            <a:off x="543955" y="521758"/>
-            <a:ext cx="7983064" cy="2324424"/>
-          </a:xfrm>
-          <a:prstGeom prst="rect">
-            <a:avLst/>
-          </a:prstGeom>
-        </p:spPr>
-      </p:pic>
-      <p:pic>
-        <p:nvPicPr>
-          <p:cNvPr id="6" name="Imagen 5">
-            <a:extLst>
-              <a:ext uri="{FF2B5EF4-FFF2-40B4-BE49-F238E27FC236}">
-                <a16:creationId xmlns:a16="http://schemas.microsoft.com/office/drawing/2014/main" id="{61ADE611-FB09-C2FC-D672-FCE7FECDAA44}"/>
-              </a:ext>
-            </a:extLst>
-          </p:cNvPr>
-          <p:cNvPicPr>
-            <a:picLocks noChangeAspect="1"/>
-          </p:cNvPicPr>
-          <p:nvPr/>
-        </p:nvPicPr>
-        <p:blipFill>
-          <a:blip r:embed="rId3"/>
-          <a:stretch>
-            <a:fillRect/>
-          </a:stretch>
-        </p:blipFill>
-        <p:spPr>
-          <a:xfrm>
-            <a:off x="0" y="2643188"/>
-            <a:ext cx="9144000" cy="1872252"/>
+            <a:off x="475678" y="1347616"/>
+            <a:ext cx="8192643" cy="2448267"/>
           </a:xfrm>
           <a:prstGeom prst="rect">
             <a:avLst/>
